--- a/carpentry/intake-142/PowerPoint/Day-10_2026-11-16_Week-4.pptx
+++ b/carpentry/intake-142/PowerPoint/Day-10_2026-11-16_Week-4.pptx
@@ -694,7 +694,7 @@
           <a:p/>
           <a:p>
             <a:r>
-              <a:t>Open the textbook to sections 4.3–4.6, pages 59–66. We are applying mixed-inch addition and subtraction to dimensions that could appear in a cut list or an assembly. Name a time you needed a total or a remaining length, and identify its unit. Why do units matter before calculating? Every combined length must use the same unit. We will work in inches, use common denominators for the fractional parts, and report the result in lowest terms with a check that fits the situation.</a:t>
+              <a:t>Open the textbook to sections 4.3–4.6, pages 92–99. We are applying mixed-inch addition and subtraction to dimensions that could appear in a cut list or an assembly. Name a time you needed a total or a remaining length, and identify its unit. Why do units matter before calculating? Every combined length must use the same unit. We will work in inches, use common denominators for the fractional parts, and report the result in lowest terms with a check that fits the situation.</a:t>
             </a:r>
           </a:p>
         </p:txBody>
@@ -1080,7 +1080,7 @@
           <a:p/>
           <a:p>
             <a:r>
-              <a:t>Figure 4.9 on page 65 provides fractional cut-list dimensions. Trace each labelled piece and identify the overall total being sought. We combine the stated lengths, not their apparent widths in the picture. Before adding, choose a denominator that can represent each fraction exactly. What should you watch after adding the fractional parts? Whether their count has reached a full whole inch. A diagram can show why the total grows, while the written arithmetic shows precisely how the smaller fractional pieces combine and carry into the whole-inch count.</a:t>
+              <a:t>Figure 4.9 on page 98 provides fractional cut-list dimensions. Trace each labelled piece and identify the overall total being sought. We combine the stated lengths, not their apparent widths in the picture. Before adding, choose a denominator that can represent each fraction exactly. What should you watch after adding the fractional parts? Whether their count has reached a full whole inch. A diagram can show why the total grows, while the written arithmetic shows precisely how the smaller fractional pieces combine and carry into the whole-inch count.</a:t>
             </a:r>
           </a:p>
         </p:txBody>
@@ -1156,7 +1156,7 @@
           <a:p/>
           <a:p>
             <a:r>
-              <a:t>Follow Example 4.9 on page 65 and point to the common-denominator line. Each renamed fraction describes the original piece length, so no material is added by the conversion. Next locate the fractional total and the carried whole. Why should we keep that intermediate line? It makes the source of the extra whole visible and helps us catch an answer that is one inch too short. Finally, examine the remaining fraction: its numerator should be smaller than the denominator and in lowest terms. Read the final length aloud as whole inches plus the fractional remainder.</a:t>
+              <a:t>Follow Example 4.9 on page 98 and point to the common-denominator line. Each renamed fraction describes the original piece length, so no material is added by the conversion. Next locate the fractional total and the carried whole. Why should we keep that intermediate line? It makes the source of the extra whole visible and helps us catch an answer that is one inch too short. Finally, examine the remaining fraction: its numerator should be smaller than the denominator and in lowest terms. Read the final length aloud as whole inches plus the fractional remainder.</a:t>
             </a:r>
           </a:p>
         </p:txBody>
@@ -2320,7 +2320,7 @@
           <a:p/>
           <a:p>
             <a:r>
-              <a:t>Open the textbook to section 4.7, pages 67–70; the fraction worksheets are on pages 71–74. We will use multiplication and division for repeated cuts and centre lines, then include the kerf stated in each problem. Kerf is the width of material removed by a saw cut. Why must it be counted separately from finished pieces? It uses stock without becoming part of a finished piece. Our final check will account for the pieces, every specified cutting loss, and the offcut.</a:t>
+              <a:t>Open the textbook to section 4.7, pages 100–107; the fraction worksheets are on pages 108–110. We will use multiplication and division for repeated cuts and centre lines, then include the kerf stated in each problem. Kerf is the width of material removed by a saw cut. Why must it be counted separately from finished pieces? It uses stock without becoming part of a finished piece. Our final check will account for the pieces, every specified cutting loss, and the offcut.</a:t>
             </a:r>
           </a:p>
         </p:txBody>
@@ -2624,7 +2624,7 @@
           <a:p/>
           <a:p>
             <a:r>
-              <a:t>On page 67, trace where the saw cuts lie relative to the finished pieces. A kerf is a narrow interval of removed material, so it occupies length along the stock even though it is absent from the finished cut list. Count the cuts described by the example, then associate one stated kerf width with each. What would happen if we ignored those intervals? We would overestimate the offcut or believe more finished material fits than the stock can supply. Keep the cut count and the piece count visible as separate information before writing the arithmetic.</a:t>
+              <a:t>On page 100, trace where the saw cuts lie relative to the finished pieces. A kerf is a narrow interval of removed material, so it occupies length along the stock even though it is absent from the finished cut list. Count the cuts described by the example, then associate one stated kerf width with each. What would happen if we ignored those intervals? We would overestimate the offcut or believe more finished material fits than the stock can supply. Keep the cut count and the piece count visible as separate information before writing the arithmetic.</a:t>
             </a:r>
           </a:p>
         </p:txBody>
@@ -2700,7 +2700,7 @@
           <a:p/>
           <a:p>
             <a:r>
-              <a:t>Example 4.11 on page 67 separates finished pieces, kerf, and offcut. Follow each term into the used-length total, then into the subtraction from stock. Why is the offcut calculated last? We must first account for everything already consumed. After finding it, reverse the process by adding all retained pieces, all stated kerfs, and the offcut. The sum should reproduce the original stock length exactly. This check is especially useful with fractions because a missing eighth-inch kerf can be mistaken for a small arithmetic error unless the terms are labelled clearly.</a:t>
+              <a:t>Example 4.11 on page 100 separates finished pieces, kerf, and offcut. Follow each term into the used-length total, then into the subtraction from stock. Why is the offcut calculated last? We must first account for everything already consumed. After finding it, reverse the process by adding all retained pieces, all stated kerfs, and the offcut. The sum should reproduce the original stock length exactly. This check is especially useful with fractions because a missing eighth-inch kerf can be mistaken for a small arithmetic error unless the terms are labelled clearly.</a:t>
             </a:r>
           </a:p>
         </p:txBody>
@@ -5462,7 +5462,7 @@
                 </a:solidFill>
                 <a:latin typeface="Arial"/>
               </a:rPr>
-              <a:t>Textbook  |  page 65</a:t>
+              <a:t>Textbook  |  page 98</a:t>
             </a:r>
           </a:p>
         </p:txBody>
@@ -5510,7 +5510,7 @@
                 </a:solidFill>
                 <a:latin typeface="Arial"/>
               </a:rPr>
-              <a:t>Textbook sections 4.3–4.6 pp.59–66</a:t>
+              <a:t>Textbook sections 4.3–4.6 pp.92–99</a:t>
             </a:r>
           </a:p>
         </p:txBody>
@@ -5582,7 +5582,7 @@
                 </a:solidFill>
                 <a:latin typeface="Arial"/>
               </a:rPr>
-              <a:t>Textbook p.65 • Example 4.9 — Common denominator and carrying a whole inch</a:t>
+              <a:t>Textbook p.98 • Example 4.9 — Common denominator and carrying a whole inch</a:t>
             </a:r>
           </a:p>
         </p:txBody>
@@ -6196,7 +6196,7 @@
                 </a:solidFill>
                 <a:latin typeface="Arial"/>
               </a:rPr>
-              <a:t>Textbook sections 4.3–4.6 pp.59–66</a:t>
+              <a:t>Textbook sections 4.3–4.6 pp.92–99</a:t>
             </a:r>
           </a:p>
         </p:txBody>
@@ -6954,7 +6954,7 @@
                 </a:solidFill>
                 <a:latin typeface="Arial"/>
               </a:rPr>
-              <a:t>Textbook sections 4.3–4.6 pp.59–66</a:t>
+              <a:t>Textbook sections 4.3–4.6 pp.92–99</a:t>
             </a:r>
           </a:p>
         </p:txBody>
@@ -7154,7 +7154,7 @@
                 </a:solidFill>
                 <a:latin typeface="Arial"/>
               </a:rPr>
-              <a:t>Resources: Exercise Book 4A Q10–15 (p.26); 4B Q2–3 (p.27)</a:t>
+              <a:t>Resources: Exercise Book 4A Q10–15 (p.36); 4B Q2–3 (p.37)</a:t>
             </a:r>
           </a:p>
         </p:txBody>
@@ -7768,7 +7768,7 @@
                 </a:solidFill>
                 <a:latin typeface="Arial"/>
               </a:rPr>
-              <a:t>Textbook sections 4.3–4.6 pp.59–66</a:t>
+              <a:t>Textbook sections 4.3–4.6 pp.92–99</a:t>
             </a:r>
           </a:p>
         </p:txBody>
@@ -8524,7 +8524,7 @@
                 </a:solidFill>
                 <a:latin typeface="Arial"/>
               </a:rPr>
-              <a:t>Textbook sections 4.3–4.6 pp.59–66</a:t>
+              <a:t>Textbook sections 4.3–4.6 pp.92–99</a:t>
             </a:r>
           </a:p>
         </p:txBody>
@@ -9258,7 +9258,7 @@
                 </a:solidFill>
                 <a:latin typeface="Arial"/>
               </a:rPr>
-              <a:t>Textbook sections 4.3–4.6 pp.59–66</a:t>
+              <a:t>Textbook sections 4.3–4.6 pp.92–99</a:t>
             </a:r>
           </a:p>
         </p:txBody>
@@ -9458,7 +9458,7 @@
                 </a:solidFill>
                 <a:latin typeface="Arial"/>
               </a:rPr>
-              <a:t>Resources: Exercise Book 4A Q10–15 (p.26); 4B Q2–3 (p.27)</a:t>
+              <a:t>Resources: Exercise Book 4A Q10–15 (p.36); 4B Q2–3 (p.37)</a:t>
             </a:r>
           </a:p>
         </p:txBody>
@@ -10072,7 +10072,7 @@
                 </a:solidFill>
                 <a:latin typeface="Arial"/>
               </a:rPr>
-              <a:t>Textbook sections 4.3–4.6 pp.59–66</a:t>
+              <a:t>Textbook sections 4.3–4.6 pp.92–99</a:t>
             </a:r>
           </a:p>
         </p:txBody>
@@ -10848,7 +10848,7 @@
                 </a:solidFill>
                 <a:latin typeface="Arial"/>
               </a:rPr>
-              <a:t>Textbook sections 4.3–4.6 pp.59–66</a:t>
+              <a:t>Textbook sections 4.3–4.6 pp.92–99</a:t>
             </a:r>
           </a:p>
         </p:txBody>
@@ -11807,7 +11807,7 @@
                 </a:solidFill>
                 <a:latin typeface="Arial"/>
               </a:rPr>
-              <a:t>Textbook sections 4.3–4.6 pp.59–66</a:t>
+              <a:t>Textbook sections 4.3–4.6 pp.92–99</a:t>
             </a:r>
           </a:p>
         </p:txBody>
@@ -12518,7 +12518,7 @@
                 </a:solidFill>
                 <a:latin typeface="Arial"/>
               </a:rPr>
-              <a:t>Textbook sections 4.3–4.6 pp.59–66</a:t>
+              <a:t>Textbook sections 4.3–4.6 pp.92–99</a:t>
             </a:r>
           </a:p>
         </p:txBody>
@@ -16581,7 +16581,7 @@
                 </a:solidFill>
                 <a:latin typeface="Arial"/>
               </a:rPr>
-              <a:t>Textbook sections 4.3–4.6 pp.59–66</a:t>
+              <a:t>Textbook sections 4.3–4.6 pp.92–99</a:t>
             </a:r>
           </a:p>
         </p:txBody>
@@ -16781,7 +16781,7 @@
                 </a:solidFill>
                 <a:latin typeface="Arial"/>
               </a:rPr>
-              <a:t>Resources: Exercise Book 4A Q10–15 (p.26); 4B Q2–3 (p.27)</a:t>
+              <a:t>Resources: Exercise Book 4A Q10–15 (p.36); 4B Q2–3 (p.37)</a:t>
             </a:r>
           </a:p>
         </p:txBody>
@@ -17395,7 +17395,7 @@
                 </a:solidFill>
                 <a:latin typeface="Arial"/>
               </a:rPr>
-              <a:t>Textbook sections 4.3–4.6 pp.59–66</a:t>
+              <a:t>Textbook sections 4.3–4.6 pp.92–99</a:t>
             </a:r>
           </a:p>
         </p:txBody>
@@ -18106,7 +18106,7 @@
                 </a:solidFill>
                 <a:latin typeface="Arial"/>
               </a:rPr>
-              <a:t>Textbook sections 4.3–4.6 pp.59–66</a:t>
+              <a:t>Textbook sections 4.3–4.6 pp.92–99</a:t>
             </a:r>
           </a:p>
         </p:txBody>
@@ -18817,7 +18817,7 @@
                 </a:solidFill>
                 <a:latin typeface="Arial"/>
               </a:rPr>
-              <a:t>Textbook sections 4.3–4.6 pp.59–66</a:t>
+              <a:t>Textbook sections 4.3–4.6 pp.92–99</a:t>
             </a:r>
           </a:p>
         </p:txBody>
@@ -19017,7 +19017,7 @@
                 </a:solidFill>
                 <a:latin typeface="Arial"/>
               </a:rPr>
-              <a:t>Resources: Exercise Book 4A Q10–15 (p.26); 4B Q2–3 (p.27)</a:t>
+              <a:t>Resources: Exercise Book 4A Q10–15 (p.36); 4B Q2–3 (p.37)</a:t>
             </a:r>
           </a:p>
         </p:txBody>
@@ -20296,7 +20296,7 @@
                 </a:solidFill>
                 <a:latin typeface="Arial"/>
               </a:rPr>
-              <a:t>Textbook sections 4.7 pp.67–70; fraction worksheets pp.71–74</a:t>
+              <a:t>Textbook sections 4.7 pp.100–107; fraction worksheets pp.108–110</a:t>
             </a:r>
           </a:p>
         </p:txBody>
@@ -20496,7 +20496,7 @@
                 </a:solidFill>
                 <a:latin typeface="Arial"/>
               </a:rPr>
-              <a:t>Textbook sections 4.7 pp.67–70; fraction worksheets pp.71–74</a:t>
+              <a:t>Textbook sections 4.7 pp.100–107; fraction worksheets pp.108–110</a:t>
             </a:r>
           </a:p>
         </p:txBody>
@@ -20544,7 +20544,7 @@
                 </a:solidFill>
                 <a:latin typeface="Arial"/>
               </a:rPr>
-              <a:t>Exercise Book 4A Q16–17 (p.26); 4B Q1,4–7 (pp.27–28); 4C Q5 (p.30)</a:t>
+              <a:t>Exercise Book 4A Q16–17 (p.36); 4B Q1,4–7 (pp.37–38); 4C Q5 (p.40)</a:t>
             </a:r>
           </a:p>
         </p:txBody>
@@ -21206,7 +21206,7 @@
                 </a:solidFill>
                 <a:latin typeface="Arial"/>
               </a:rPr>
-              <a:t>Textbook sections 4.7 pp.67–70; fraction worksheets pp.71–74</a:t>
+              <a:t>Textbook sections 4.7 pp.100–107; fraction worksheets pp.108–110</a:t>
             </a:r>
           </a:p>
         </p:txBody>
@@ -21406,7 +21406,7 @@
                 </a:solidFill>
                 <a:latin typeface="Arial"/>
               </a:rPr>
-              <a:t>Resources: Exercise Book 4A Q16–17 (p.26); 4B Q1,4–7 (pp.27–28); 4C Q5 (p.30)</a:t>
+              <a:t>Resources: Exercise Book 4A Q16–17 (p.36); 4B Q1,4–7 (pp.37–38); 4C Q5 (p.40)</a:t>
             </a:r>
           </a:p>
         </p:txBody>
@@ -22155,7 +22155,7 @@
                 </a:solidFill>
                 <a:latin typeface="Arial"/>
               </a:rPr>
-              <a:t>Textbook sections 4.7 pp.67–70; fraction worksheets pp.71–74</a:t>
+              <a:t>Textbook sections 4.7 pp.100–107; fraction worksheets pp.108–110</a:t>
             </a:r>
           </a:p>
         </p:txBody>
@@ -23400,7 +23400,7 @@
                 </a:solidFill>
                 <a:latin typeface="Arial"/>
               </a:rPr>
-              <a:t>Textbook sections 4.7 pp.67–70; fraction worksheets pp.71–74</a:t>
+              <a:t>Textbook sections 4.7 pp.100–107; fraction worksheets pp.108–110</a:t>
             </a:r>
           </a:p>
         </p:txBody>
@@ -25314,7 +25314,7 @@
                 </a:solidFill>
                 <a:latin typeface="Arial"/>
               </a:rPr>
-              <a:t>Textbook sections 4.3–4.6 pp.59–66</a:t>
+              <a:t>Textbook sections 4.3–4.6 pp.92–99</a:t>
             </a:r>
           </a:p>
         </p:txBody>
@@ -25514,7 +25514,7 @@
                 </a:solidFill>
                 <a:latin typeface="Arial"/>
               </a:rPr>
-              <a:t>Textbook sections 4.3–4.6 pp.59–66</a:t>
+              <a:t>Textbook sections 4.3–4.6 pp.92–99</a:t>
             </a:r>
           </a:p>
         </p:txBody>
@@ -25562,7 +25562,7 @@
                 </a:solidFill>
                 <a:latin typeface="Arial"/>
               </a:rPr>
-              <a:t>Exercise Book 4A Q10–15 (p.26); 4B Q2–3 (p.27)</a:t>
+              <a:t>Exercise Book 4A Q10–15 (p.36); 4B Q2–3 (p.37)</a:t>
             </a:r>
           </a:p>
         </p:txBody>
@@ -26176,7 +26176,7 @@
                 </a:solidFill>
                 <a:latin typeface="Arial"/>
               </a:rPr>
-              <a:t>Textbook  |  page 67</a:t>
+              <a:t>Textbook  |  page 100</a:t>
             </a:r>
           </a:p>
         </p:txBody>
@@ -26224,7 +26224,7 @@
                 </a:solidFill>
                 <a:latin typeface="Arial"/>
               </a:rPr>
-              <a:t>Textbook sections 4.7 pp.67–70; fraction worksheets pp.71–74</a:t>
+              <a:t>Textbook sections 4.7 pp.100–107; fraction worksheets pp.108–110</a:t>
             </a:r>
           </a:p>
         </p:txBody>
@@ -26296,7 +26296,7 @@
                 </a:solidFill>
                 <a:latin typeface="Arial"/>
               </a:rPr>
-              <a:t>Textbook p.67 • Saw cuts in fractions — Count the stated kerfs</a:t>
+              <a:t>Textbook p.100 • Saw cuts in fractions — Count the stated kerfs</a:t>
             </a:r>
           </a:p>
         </p:txBody>
@@ -26862,7 +26862,7 @@
                 </a:solidFill>
                 <a:latin typeface="Arial"/>
               </a:rPr>
-              <a:t>Textbook  |  page 67</a:t>
+              <a:t>Textbook  |  page 100</a:t>
             </a:r>
           </a:p>
         </p:txBody>
@@ -26910,7 +26910,7 @@
                 </a:solidFill>
                 <a:latin typeface="Arial"/>
               </a:rPr>
-              <a:t>Textbook sections 4.7 pp.67–70; fraction worksheets pp.71–74</a:t>
+              <a:t>Textbook sections 4.7 pp.100–107; fraction worksheets pp.108–110</a:t>
             </a:r>
           </a:p>
         </p:txBody>
@@ -26982,7 +26982,7 @@
                 </a:solidFill>
                 <a:latin typeface="Arial"/>
               </a:rPr>
-              <a:t>Textbook p.67 • Example 4.11 — Pieces, kerf and offcut</a:t>
+              <a:t>Textbook p.100 • Example 4.11 — Pieces, kerf and offcut</a:t>
             </a:r>
           </a:p>
         </p:txBody>
@@ -27596,7 +27596,7 @@
                 </a:solidFill>
                 <a:latin typeface="Arial"/>
               </a:rPr>
-              <a:t>Textbook sections 4.7 pp.67–70; fraction worksheets pp.71–74</a:t>
+              <a:t>Textbook sections 4.7 pp.100–107; fraction worksheets pp.108–110</a:t>
             </a:r>
           </a:p>
         </p:txBody>
@@ -28354,7 +28354,7 @@
                 </a:solidFill>
                 <a:latin typeface="Arial"/>
               </a:rPr>
-              <a:t>Textbook sections 4.7 pp.67–70; fraction worksheets pp.71–74</a:t>
+              <a:t>Textbook sections 4.7 pp.100–107; fraction worksheets pp.108–110</a:t>
             </a:r>
           </a:p>
         </p:txBody>
@@ -28554,7 +28554,7 @@
                 </a:solidFill>
                 <a:latin typeface="Arial"/>
               </a:rPr>
-              <a:t>Resources: Exercise Book 4A Q16–17 (p.26); 4B Q1,4–7 (pp.27–28); 4C Q5 (p.30)</a:t>
+              <a:t>Resources: Exercise Book 4A Q16–17 (p.36); 4B Q1,4–7 (pp.37–38); 4C Q5 (p.40)</a:t>
             </a:r>
           </a:p>
         </p:txBody>
@@ -29168,7 +29168,7 @@
                 </a:solidFill>
                 <a:latin typeface="Arial"/>
               </a:rPr>
-              <a:t>Textbook sections 4.7 pp.67–70; fraction worksheets pp.71–74</a:t>
+              <a:t>Textbook sections 4.7 pp.100–107; fraction worksheets pp.108–110</a:t>
             </a:r>
           </a:p>
         </p:txBody>
@@ -29924,7 +29924,7 @@
                 </a:solidFill>
                 <a:latin typeface="Arial"/>
               </a:rPr>
-              <a:t>Textbook sections 4.7 pp.67–70; fraction worksheets pp.71–74</a:t>
+              <a:t>Textbook sections 4.7 pp.100–107; fraction worksheets pp.108–110</a:t>
             </a:r>
           </a:p>
         </p:txBody>
@@ -30706,7 +30706,7 @@
                 </a:solidFill>
                 <a:latin typeface="Arial"/>
               </a:rPr>
-              <a:t>Textbook sections 4.7 pp.67–70; fraction worksheets pp.71–74</a:t>
+              <a:t>Textbook sections 4.7 pp.100–107; fraction worksheets pp.108–110</a:t>
             </a:r>
           </a:p>
         </p:txBody>
@@ -30906,7 +30906,7 @@
                 </a:solidFill>
                 <a:latin typeface="Arial"/>
               </a:rPr>
-              <a:t>Resources: Exercise Book 4A Q16–17 (p.26); 4B Q1,4–7 (pp.27–28); 4C Q5 (p.30)</a:t>
+              <a:t>Resources: Exercise Book 4A Q16–17 (p.36); 4B Q1,4–7 (pp.37–38); 4C Q5 (p.40)</a:t>
             </a:r>
           </a:p>
         </p:txBody>
@@ -31520,7 +31520,7 @@
                 </a:solidFill>
                 <a:latin typeface="Arial"/>
               </a:rPr>
-              <a:t>Textbook sections 4.7 pp.67–70; fraction worksheets pp.71–74</a:t>
+              <a:t>Textbook sections 4.7 pp.100–107; fraction worksheets pp.108–110</a:t>
             </a:r>
           </a:p>
         </p:txBody>
@@ -32296,7 +32296,7 @@
                 </a:solidFill>
                 <a:latin typeface="Arial"/>
               </a:rPr>
-              <a:t>Textbook sections 4.7 pp.67–70; fraction worksheets pp.71–74</a:t>
+              <a:t>Textbook sections 4.7 pp.100–107; fraction worksheets pp.108–110</a:t>
             </a:r>
           </a:p>
         </p:txBody>
@@ -33255,7 +33255,7 @@
                 </a:solidFill>
                 <a:latin typeface="Arial"/>
               </a:rPr>
-              <a:t>Textbook sections 4.7 pp.67–70; fraction worksheets pp.71–74</a:t>
+              <a:t>Textbook sections 4.7 pp.100–107; fraction worksheets pp.108–110</a:t>
             </a:r>
           </a:p>
         </p:txBody>
@@ -33966,7 +33966,7 @@
                 </a:solidFill>
                 <a:latin typeface="Arial"/>
               </a:rPr>
-              <a:t>Textbook sections 4.3–4.6 pp.59–66</a:t>
+              <a:t>Textbook sections 4.3–4.6 pp.92–99</a:t>
             </a:r>
           </a:p>
         </p:txBody>
@@ -34166,7 +34166,7 @@
                 </a:solidFill>
                 <a:latin typeface="Arial"/>
               </a:rPr>
-              <a:t>Resources: Exercise Book 4A Q10–15 (p.26); 4B Q2–3 (p.27)</a:t>
+              <a:t>Resources: Exercise Book 4A Q10–15 (p.36); 4B Q2–3 (p.37)</a:t>
             </a:r>
           </a:p>
         </p:txBody>
@@ -34780,7 +34780,7 @@
                 </a:solidFill>
                 <a:latin typeface="Arial"/>
               </a:rPr>
-              <a:t>Textbook sections 4.7 pp.67–70; fraction worksheets pp.71–74</a:t>
+              <a:t>Textbook sections 4.7 pp.100–107; fraction worksheets pp.108–110</a:t>
             </a:r>
           </a:p>
         </p:txBody>
@@ -35491,7 +35491,7 @@
                 </a:solidFill>
                 <a:latin typeface="Arial"/>
               </a:rPr>
-              <a:t>Textbook sections 4.7 pp.67–70; fraction worksheets pp.71–74</a:t>
+              <a:t>Textbook sections 4.7 pp.100–107; fraction worksheets pp.108–110</a:t>
             </a:r>
           </a:p>
         </p:txBody>
@@ -35691,7 +35691,7 @@
                 </a:solidFill>
                 <a:latin typeface="Arial"/>
               </a:rPr>
-              <a:t>Resources: Exercise Book 4A Q16–17 (p.26); 4B Q1,4–7 (pp.27–28); 4C Q5 (p.30)</a:t>
+              <a:t>Resources: Exercise Book 4A Q16–17 (p.36); 4B Q1,4–7 (pp.37–38); 4C Q5 (p.40)</a:t>
             </a:r>
           </a:p>
         </p:txBody>
@@ -36305,7 +36305,7 @@
                 </a:solidFill>
                 <a:latin typeface="Arial"/>
               </a:rPr>
-              <a:t>Textbook sections 4.7 pp.67–70; fraction worksheets pp.71–74</a:t>
+              <a:t>Textbook sections 4.7 pp.100–107; fraction worksheets pp.108–110</a:t>
             </a:r>
           </a:p>
         </p:txBody>
@@ -37016,7 +37016,7 @@
                 </a:solidFill>
                 <a:latin typeface="Arial"/>
               </a:rPr>
-              <a:t>Textbook sections 4.7 pp.67–70; fraction worksheets pp.71–74</a:t>
+              <a:t>Textbook sections 4.7 pp.100–107; fraction worksheets pp.108–110</a:t>
             </a:r>
           </a:p>
         </p:txBody>
@@ -37727,7 +37727,7 @@
                 </a:solidFill>
                 <a:latin typeface="Arial"/>
               </a:rPr>
-              <a:t>Textbook sections 4.7 pp.67–70; fraction worksheets pp.71–74</a:t>
+              <a:t>Textbook sections 4.7 pp.100–107; fraction worksheets pp.108–110</a:t>
             </a:r>
           </a:p>
         </p:txBody>
@@ -37927,7 +37927,7 @@
                 </a:solidFill>
                 <a:latin typeface="Arial"/>
               </a:rPr>
-              <a:t>Resources: Exercise Book 4A Q16–17 (p.26); 4B Q1,4–7 (pp.27–28); 4C Q5 (p.30)</a:t>
+              <a:t>Resources: Exercise Book 4A Q16–17 (p.36); 4B Q1,4–7 (pp.37–38); 4C Q5 (p.40)</a:t>
             </a:r>
           </a:p>
         </p:txBody>
@@ -38541,7 +38541,7 @@
                 </a:solidFill>
                 <a:latin typeface="Arial"/>
               </a:rPr>
-              <a:t>Textbook sections 4.3–4.6 pp.59–66</a:t>
+              <a:t>Textbook sections 4.3–4.6 pp.92–99</a:t>
             </a:r>
           </a:p>
         </p:txBody>
@@ -39387,7 +39387,7 @@
                 </a:solidFill>
                 <a:latin typeface="Arial"/>
               </a:rPr>
-              <a:t>Textbook sections 4.3–4.6 pp.59–66</a:t>
+              <a:t>Textbook sections 4.3–4.6 pp.92–99</a:t>
             </a:r>
           </a:p>
         </p:txBody>
@@ -40632,7 +40632,7 @@
                 </a:solidFill>
                 <a:latin typeface="Arial"/>
               </a:rPr>
-              <a:t>Textbook sections 4.3–4.6 pp.59–66</a:t>
+              <a:t>Textbook sections 4.3–4.6 pp.92–99</a:t>
             </a:r>
           </a:p>
         </p:txBody>
@@ -42543,7 +42543,7 @@
                 </a:solidFill>
                 <a:latin typeface="Arial"/>
               </a:rPr>
-              <a:t>Textbook  |  page 65</a:t>
+              <a:t>Textbook  |  page 98</a:t>
             </a:r>
           </a:p>
         </p:txBody>
@@ -42591,7 +42591,7 @@
                 </a:solidFill>
                 <a:latin typeface="Arial"/>
               </a:rPr>
-              <a:t>Textbook sections 4.3–4.6 pp.59–66</a:t>
+              <a:t>Textbook sections 4.3–4.6 pp.92–99</a:t>
             </a:r>
           </a:p>
         </p:txBody>
@@ -42663,7 +42663,7 @@
                 </a:solidFill>
                 <a:latin typeface="Arial"/>
               </a:rPr>
-              <a:t>Textbook p.65 • Figure 4.9 — Fractional cut-list dimensions</a:t>
+              <a:t>Textbook p.98 • Figure 4.9 — Fractional cut-list dimensions</a:t>
             </a:r>
           </a:p>
         </p:txBody>

--- a/carpentry/intake-142/PowerPoint/Day-10_2026-11-16_Week-4.pptx
+++ b/carpentry/intake-142/PowerPoint/Day-10_2026-11-16_Week-4.pptx
@@ -19290,6 +19290,104 @@
           </a:p>
         </p:txBody>
       </p:sp>
+      <p:sp>
+        <p:nvSpPr>
+          <p:cNvPr id="22" name="Play quiz W04-L01"/>
+          <p:cNvSpPr txBox="1"/>
+          <p:nvPr/>
+        </p:nvSpPr>
+        <p:spPr>
+          <a:xfrm>
+            <a:off x="6355080" y="6606540"/>
+            <a:ext cx="822960" cy="210312"/>
+          </a:xfrm>
+          <a:prstGeom prst="rect">
+            <a:avLst/>
+          </a:prstGeom>
+          <a:noFill/>
+        </p:spPr>
+        <p:txBody>
+          <a:bodyPr wrap="square" lIns="0" rIns="0" tIns="0" bIns="0" anchor="t">
+            <a:normAutofit fontScale="100000" lnSpcReduction="0"/>
+          </a:bodyPr>
+          <a:lstStyle/>
+          <a:p>
+            <a:pPr>
+              <a:spcBef>
+                <a:spcPts val="0"/>
+              </a:spcBef>
+              <a:spcAft>
+                <a:spcPts val="0"/>
+              </a:spcAft>
+              <a:defRPr sz="1000" b="0">
+                <a:solidFill>
+                  <a:srgbClr val="D0002B"/>
+                </a:solidFill>
+                <a:latin typeface="Arial"/>
+              </a:defRPr>
+            </a:pPr>
+            <a:r>
+              <a:rPr sz="1000">
+                <a:solidFill>
+                  <a:srgbClr val="F7F8FC"/>
+                </a:solidFill>
+                <a:latin typeface="Arial"/>
+                <a:hlinkClick r:id="rId8"/>
+              </a:rPr>
+              <a:t>Play quiz</a:t>
+            </a:r>
+          </a:p>
+        </p:txBody>
+      </p:sp>
+      <p:sp>
+        <p:nvSpPr>
+          <p:cNvPr id="23" name="Quiz PDF W04-L01"/>
+          <p:cNvSpPr txBox="1"/>
+          <p:nvPr/>
+        </p:nvSpPr>
+        <p:spPr>
+          <a:xfrm>
+            <a:off x="7296912" y="6606540"/>
+            <a:ext cx="1005840" cy="210312"/>
+          </a:xfrm>
+          <a:prstGeom prst="rect">
+            <a:avLst/>
+          </a:prstGeom>
+          <a:noFill/>
+        </p:spPr>
+        <p:txBody>
+          <a:bodyPr wrap="square" lIns="0" rIns="0" tIns="0" bIns="0" anchor="t">
+            <a:normAutofit fontScale="100000" lnSpcReduction="0"/>
+          </a:bodyPr>
+          <a:lstStyle/>
+          <a:p>
+            <a:pPr>
+              <a:spcBef>
+                <a:spcPts val="0"/>
+              </a:spcBef>
+              <a:spcAft>
+                <a:spcPts val="0"/>
+              </a:spcAft>
+              <a:defRPr sz="1000" b="0">
+                <a:solidFill>
+                  <a:srgbClr val="D0002B"/>
+                </a:solidFill>
+                <a:latin typeface="Arial"/>
+              </a:defRPr>
+            </a:pPr>
+            <a:r>
+              <a:rPr sz="1000">
+                <a:solidFill>
+                  <a:srgbClr val="F7F8FC"/>
+                </a:solidFill>
+                <a:latin typeface="Arial"/>
+                <a:hlinkClick r:id="rId9"/>
+              </a:rPr>
+              <a:t>Quiz PDF</a:t>
+            </a:r>
+          </a:p>
+        </p:txBody>
+      </p:sp>
     </p:spTree>
   </p:cSld>
   <p:clrMapOvr>
@@ -38196,6 +38294,104 @@
                 <a:latin typeface="Arial"/>
               </a:rPr>
               <a:t>Day 10  •  2026-11-16  •  44</a:t>
+            </a:r>
+          </a:p>
+        </p:txBody>
+      </p:sp>
+      <p:sp>
+        <p:nvSpPr>
+          <p:cNvPr id="22" name="Play quiz W04-L02"/>
+          <p:cNvSpPr txBox="1"/>
+          <p:nvPr/>
+        </p:nvSpPr>
+        <p:spPr>
+          <a:xfrm>
+            <a:off x="6355080" y="6606540"/>
+            <a:ext cx="822960" cy="210312"/>
+          </a:xfrm>
+          <a:prstGeom prst="rect">
+            <a:avLst/>
+          </a:prstGeom>
+          <a:noFill/>
+        </p:spPr>
+        <p:txBody>
+          <a:bodyPr wrap="square" lIns="0" rIns="0" tIns="0" bIns="0" anchor="t">
+            <a:normAutofit fontScale="100000" lnSpcReduction="0"/>
+          </a:bodyPr>
+          <a:lstStyle/>
+          <a:p>
+            <a:pPr>
+              <a:spcBef>
+                <a:spcPts val="0"/>
+              </a:spcBef>
+              <a:spcAft>
+                <a:spcPts val="0"/>
+              </a:spcAft>
+              <a:defRPr sz="1000" b="0">
+                <a:solidFill>
+                  <a:srgbClr val="D0002B"/>
+                </a:solidFill>
+                <a:latin typeface="Arial"/>
+              </a:defRPr>
+            </a:pPr>
+            <a:r>
+              <a:rPr sz="1000">
+                <a:solidFill>
+                  <a:srgbClr val="F7F8FC"/>
+                </a:solidFill>
+                <a:latin typeface="Arial"/>
+                <a:hlinkClick r:id="rId8"/>
+              </a:rPr>
+              <a:t>Play quiz</a:t>
+            </a:r>
+          </a:p>
+        </p:txBody>
+      </p:sp>
+      <p:sp>
+        <p:nvSpPr>
+          <p:cNvPr id="23" name="Quiz PDF W04-L02"/>
+          <p:cNvSpPr txBox="1"/>
+          <p:nvPr/>
+        </p:nvSpPr>
+        <p:spPr>
+          <a:xfrm>
+            <a:off x="7296912" y="6606540"/>
+            <a:ext cx="1005840" cy="210312"/>
+          </a:xfrm>
+          <a:prstGeom prst="rect">
+            <a:avLst/>
+          </a:prstGeom>
+          <a:noFill/>
+        </p:spPr>
+        <p:txBody>
+          <a:bodyPr wrap="square" lIns="0" rIns="0" tIns="0" bIns="0" anchor="t">
+            <a:normAutofit fontScale="100000" lnSpcReduction="0"/>
+          </a:bodyPr>
+          <a:lstStyle/>
+          <a:p>
+            <a:pPr>
+              <a:spcBef>
+                <a:spcPts val="0"/>
+              </a:spcBef>
+              <a:spcAft>
+                <a:spcPts val="0"/>
+              </a:spcAft>
+              <a:defRPr sz="1000" b="0">
+                <a:solidFill>
+                  <a:srgbClr val="D0002B"/>
+                </a:solidFill>
+                <a:latin typeface="Arial"/>
+              </a:defRPr>
+            </a:pPr>
+            <a:r>
+              <a:rPr sz="1000">
+                <a:solidFill>
+                  <a:srgbClr val="F7F8FC"/>
+                </a:solidFill>
+                <a:latin typeface="Arial"/>
+                <a:hlinkClick r:id="rId9"/>
+              </a:rPr>
+              <a:t>Quiz PDF</a:t>
             </a:r>
           </a:p>
         </p:txBody>
